--- a/2026/LEC/01-1 Введение в АВР.pptx
+++ b/2026/LEC/01-1 Введение в АВР.pptx
@@ -217,7 +217,7 @@
           <a:p>
             <a:fld id="{CDA96C9A-3213-B245-BC64-7E419D14BD9D}" type="datetimeFigureOut">
               <a:rPr lang="ru-RU" smtClean="0"/>
-              <a:t>20.08.2025</a:t>
+              <a:t>12.02.2026</a:t>
             </a:fld>
             <a:endParaRPr lang="ru-RU"/>
           </a:p>
@@ -1376,7 +1376,7 @@
           <a:p>
             <a:fld id="{BEE214BE-636D-8A45-BCA6-8B7ED77AA124}" type="datetime1">
               <a:rPr lang="ru-RU" smtClean="0"/>
-              <a:t>20.08.2025</a:t>
+              <a:t>12.02.2026</a:t>
             </a:fld>
             <a:endParaRPr lang="en-US"/>
           </a:p>
@@ -1546,7 +1546,7 @@
           <a:p>
             <a:fld id="{5855274A-4ED4-0146-A3E9-88EF200B5196}" type="datetime1">
               <a:rPr lang="ru-RU" smtClean="0"/>
-              <a:t>20.08.2025</a:t>
+              <a:t>12.02.2026</a:t>
             </a:fld>
             <a:endParaRPr lang="en-US"/>
           </a:p>
@@ -1726,7 +1726,7 @@
           <a:p>
             <a:fld id="{8A78DFF1-9FDC-144B-973E-B4B4609709DF}" type="datetime1">
               <a:rPr lang="ru-RU" smtClean="0"/>
-              <a:t>20.08.2025</a:t>
+              <a:t>12.02.2026</a:t>
             </a:fld>
             <a:endParaRPr lang="en-US"/>
           </a:p>
@@ -1896,7 +1896,7 @@
           <a:p>
             <a:fld id="{8233A339-F8AE-5C45-BEAE-07EF9DC78B60}" type="datetime1">
               <a:rPr lang="ru-RU" smtClean="0"/>
-              <a:t>20.08.2025</a:t>
+              <a:t>12.02.2026</a:t>
             </a:fld>
             <a:endParaRPr lang="en-US"/>
           </a:p>
@@ -2142,7 +2142,7 @@
           <a:p>
             <a:fld id="{7586FDE4-97E0-CE4A-988C-F30B221290A7}" type="datetime1">
               <a:rPr lang="ru-RU" smtClean="0"/>
-              <a:t>20.08.2025</a:t>
+              <a:t>12.02.2026</a:t>
             </a:fld>
             <a:endParaRPr lang="en-US"/>
           </a:p>
@@ -2374,7 +2374,7 @@
           <a:p>
             <a:fld id="{C36ECE8B-8DEC-154E-9F03-047C8DDA20DC}" type="datetime1">
               <a:rPr lang="ru-RU" smtClean="0"/>
-              <a:t>20.08.2025</a:t>
+              <a:t>12.02.2026</a:t>
             </a:fld>
             <a:endParaRPr lang="en-US"/>
           </a:p>
@@ -2741,7 +2741,7 @@
           <a:p>
             <a:fld id="{440816D5-BDB8-B34B-8ACA-ECBDD12E7321}" type="datetime1">
               <a:rPr lang="ru-RU" smtClean="0"/>
-              <a:t>20.08.2025</a:t>
+              <a:t>12.02.2026</a:t>
             </a:fld>
             <a:endParaRPr lang="en-US"/>
           </a:p>
@@ -2859,7 +2859,7 @@
           <a:p>
             <a:fld id="{8A8C589A-5627-764C-AF96-C1E2F9A00A4D}" type="datetime1">
               <a:rPr lang="ru-RU" smtClean="0"/>
-              <a:t>20.08.2025</a:t>
+              <a:t>12.02.2026</a:t>
             </a:fld>
             <a:endParaRPr lang="en-US"/>
           </a:p>
@@ -2954,7 +2954,7 @@
           <a:p>
             <a:fld id="{603EE0D0-1696-6D4F-B917-4AFB24A74E8B}" type="datetime1">
               <a:rPr lang="ru-RU" smtClean="0"/>
-              <a:t>20.08.2025</a:t>
+              <a:t>12.02.2026</a:t>
             </a:fld>
             <a:endParaRPr lang="en-US"/>
           </a:p>
@@ -3231,7 +3231,7 @@
           <a:p>
             <a:fld id="{13C8A91E-B09B-2240-9AA3-B1D4BCC6296E}" type="datetime1">
               <a:rPr lang="ru-RU" smtClean="0"/>
-              <a:t>20.08.2025</a:t>
+              <a:t>12.02.2026</a:t>
             </a:fld>
             <a:endParaRPr lang="en-US"/>
           </a:p>
@@ -3488,7 +3488,7 @@
           <a:p>
             <a:fld id="{3BE9760E-DA8D-6747-B31E-62858C8727B8}" type="datetime1">
               <a:rPr lang="ru-RU" smtClean="0"/>
-              <a:t>20.08.2025</a:t>
+              <a:t>12.02.2026</a:t>
             </a:fld>
             <a:endParaRPr lang="en-US"/>
           </a:p>
@@ -3701,7 +3701,7 @@
           <a:p>
             <a:fld id="{D31305DF-F750-CC43-967D-51A20925EE94}" type="datetime1">
               <a:rPr lang="ru-RU" smtClean="0"/>
-              <a:t>20.08.2025</a:t>
+              <a:t>12.02.2026</a:t>
             </a:fld>
             <a:endParaRPr lang="en-US"/>
           </a:p>
@@ -4193,6 +4193,13 @@
   <p:clrMapOvr>
     <a:masterClrMapping/>
   </p:clrMapOvr>
+  <p:timing>
+    <p:tnLst>
+      <p:par>
+        <p:cTn id="1" dur="indefinite" restart="never" nodeType="tmRoot"/>
+      </p:par>
+    </p:tnLst>
+  </p:timing>
 </p:sld>
 </file>
 
@@ -4648,6 +4655,13 @@
   <p:clrMapOvr>
     <a:masterClrMapping/>
   </p:clrMapOvr>
+  <p:timing>
+    <p:tnLst>
+      <p:par>
+        <p:cTn id="1" dur="indefinite" restart="never" nodeType="tmRoot"/>
+      </p:par>
+    </p:tnLst>
+  </p:timing>
 </p:sld>
 </file>
 
@@ -5004,6 +5018,13 @@
   <p:clrMapOvr>
     <a:masterClrMapping/>
   </p:clrMapOvr>
+  <p:timing>
+    <p:tnLst>
+      <p:par>
+        <p:cTn id="1" dur="indefinite" restart="never" nodeType="tmRoot"/>
+      </p:par>
+    </p:tnLst>
+  </p:timing>
 </p:sld>
 </file>
 
@@ -5099,6 +5120,13 @@
   <p:clrMapOvr>
     <a:masterClrMapping/>
   </p:clrMapOvr>
+  <p:timing>
+    <p:tnLst>
+      <p:par>
+        <p:cTn id="1" dur="indefinite" restart="never" nodeType="tmRoot"/>
+      </p:par>
+    </p:tnLst>
+  </p:timing>
 </p:sld>
 </file>
 
@@ -5275,6 +5303,47 @@
           </a:prstGeom>
         </p:spPr>
       </p:pic>
+      <p:pic>
+        <p:nvPicPr>
+          <p:cNvPr id="1026" name="Picture 2" descr="Univariate versus multivariate time series forecasting: an application to  international tourism demand - ScienceDirect"/>
+          <p:cNvPicPr>
+            <a:picLocks noChangeAspect="1" noChangeArrowheads="1"/>
+          </p:cNvPicPr>
+          <p:nvPr/>
+        </p:nvPicPr>
+        <p:blipFill>
+          <a:blip r:embed="rId3">
+            <a:extLst>
+              <a:ext uri="{28A0092B-C50C-407E-A947-70E740481C1C}">
+                <a14:useLocalDpi xmlns:a14="http://schemas.microsoft.com/office/drawing/2010/main" val="0"/>
+              </a:ext>
+            </a:extLst>
+          </a:blip>
+          <a:srcRect/>
+          <a:stretch>
+            <a:fillRect/>
+          </a:stretch>
+        </p:blipFill>
+        <p:spPr bwMode="auto">
+          <a:xfrm>
+            <a:off x="7177582" y="3028213"/>
+            <a:ext cx="4176218" cy="3497263"/>
+          </a:xfrm>
+          <a:prstGeom prst="rect">
+            <a:avLst/>
+          </a:prstGeom>
+          <a:noFill/>
+          <a:extLst>
+            <a:ext uri="{909E8E84-426E-40DD-AFC4-6F175D3DCCD1}">
+              <a14:hiddenFill xmlns:a14="http://schemas.microsoft.com/office/drawing/2010/main">
+                <a:solidFill>
+                  <a:srgbClr val="FFFFFF"/>
+                </a:solidFill>
+              </a14:hiddenFill>
+            </a:ext>
+          </a:extLst>
+        </p:spPr>
+      </p:pic>
     </p:spTree>
     <p:extLst>
       <p:ext uri="{BB962C8B-B14F-4D97-AF65-F5344CB8AC3E}">
@@ -5285,6 +5354,13 @@
   <p:clrMapOvr>
     <a:masterClrMapping/>
   </p:clrMapOvr>
+  <p:timing>
+    <p:tnLst>
+      <p:par>
+        <p:cTn id="1" dur="indefinite" restart="never" nodeType="tmRoot"/>
+      </p:par>
+    </p:tnLst>
+  </p:timing>
 </p:sld>
 </file>
 
@@ -5715,6 +5791,13 @@
       <p:transition spd="slow"/>
     </mc:Fallback>
   </mc:AlternateContent>
+  <p:timing>
+    <p:tnLst>
+      <p:par>
+        <p:cTn id="1" dur="indefinite" restart="never" nodeType="tmRoot"/>
+      </p:par>
+    </p:tnLst>
+  </p:timing>
 </p:sld>
 </file>
 
@@ -7516,8 +7599,29 @@
             </a:r>
             <a:r>
               <a:rPr lang="ru-RU" sz="2200" dirty="0"/>
-              <a:t> значение переменной</a:t>
-            </a:r>
+              <a:t> значение </a:t>
+            </a:r>
+            <a:r>
+              <a:rPr lang="ru-RU" sz="2200" dirty="0" smtClean="0"/>
+              <a:t>переменной</a:t>
+            </a:r>
+            <a:endParaRPr lang="en-US" sz="2200" dirty="0" smtClean="0"/>
+          </a:p>
+          <a:p>
+            <a:pPr lvl="1"/>
+            <a:r>
+              <a:rPr lang="ru-RU" sz="1800" b="1" dirty="0" smtClean="0"/>
+              <a:t>ВР могут быть дискретными и </a:t>
+            </a:r>
+            <a:r>
+              <a:rPr lang="ru-RU" sz="1800" b="1" dirty="0" err="1" smtClean="0"/>
+              <a:t>неприрывными</a:t>
+            </a:r>
+            <a:r>
+              <a:rPr lang="ru-RU" sz="1800" b="1" dirty="0" smtClean="0"/>
+              <a:t>.</a:t>
+            </a:r>
+            <a:endParaRPr lang="ru-RU" sz="1800" b="1" dirty="0"/>
           </a:p>
           <a:p>
             <a:r>
@@ -8294,6 +8398,13 @@
   <p:clrMapOvr>
     <a:masterClrMapping/>
   </p:clrMapOvr>
+  <p:timing>
+    <p:tnLst>
+      <p:par>
+        <p:cTn id="1" dur="indefinite" restart="never" nodeType="tmRoot"/>
+      </p:par>
+    </p:tnLst>
+  </p:timing>
 </p:sld>
 </file>
 
@@ -8923,6 +9034,13 @@
   <p:clrMapOvr>
     <a:masterClrMapping/>
   </p:clrMapOvr>
+  <p:timing>
+    <p:tnLst>
+      <p:par>
+        <p:cTn id="1" dur="indefinite" restart="never" nodeType="tmRoot"/>
+      </p:par>
+    </p:tnLst>
+  </p:timing>
 </p:sld>
 </file>
 
@@ -9392,6 +9510,13 @@
   <p:clrMapOvr>
     <a:masterClrMapping/>
   </p:clrMapOvr>
+  <p:timing>
+    <p:tnLst>
+      <p:par>
+        <p:cTn id="1" dur="indefinite" restart="never" nodeType="tmRoot"/>
+      </p:par>
+    </p:tnLst>
+  </p:timing>
 </p:sld>
 </file>
 
@@ -9524,7 +9649,15 @@
             <a:pPr lvl="1" fontAlgn="base"/>
             <a:r>
               <a:rPr lang="ru-RU" sz="2200" dirty="0"/>
-              <a:t>бывает небольшое число наблюдений (как правило при работе с </a:t>
+              <a:t>бывает небольшое число </a:t>
+            </a:r>
+            <a:r>
+              <a:rPr lang="ru-RU" sz="2200" dirty="0" smtClean="0"/>
+              <a:t>эффективных наблюдений </a:t>
+            </a:r>
+            <a:r>
+              <a:rPr lang="ru-RU" sz="2200" dirty="0"/>
+              <a:t>(как правило при работе с </a:t>
             </a:r>
             <a:r>
               <a:rPr lang="ru-RU" sz="2200" dirty="0" err="1"/>
@@ -9693,8 +9826,13 @@
           <a:p>
             <a:r>
               <a:rPr lang="ru-RU" dirty="0"/>
-              <a:t>https://ivan-shamaev.ru/time-series-analysis-forecasting-and-models-python-libraries/?ysclid=mckto9evgd241570139</a:t>
-            </a:r>
+              <a:t>https://</a:t>
+            </a:r>
+            <a:r>
+              <a:rPr lang="ru-RU" dirty="0" smtClean="0"/>
+              <a:t>ivan-shamaev.ru/time-series-analysis-forecasting-and-models-python-libraries</a:t>
+            </a:r>
+            <a:endParaRPr lang="ru-RU" dirty="0"/>
           </a:p>
         </p:txBody>
       </p:sp>
@@ -9708,6 +9846,13 @@
   <p:clrMapOvr>
     <a:masterClrMapping/>
   </p:clrMapOvr>
+  <p:timing>
+    <p:tnLst>
+      <p:par>
+        <p:cTn id="1" dur="indefinite" restart="never" nodeType="tmRoot"/>
+      </p:par>
+    </p:tnLst>
+  </p:timing>
 </p:sld>
 </file>
 
@@ -10027,6 +10172,13 @@
   <p:clrMapOvr>
     <a:masterClrMapping/>
   </p:clrMapOvr>
+  <p:timing>
+    <p:tnLst>
+      <p:par>
+        <p:cTn id="1" dur="indefinite" restart="never" nodeType="tmRoot"/>
+      </p:par>
+    </p:tnLst>
+  </p:timing>
 </p:sld>
 </file>
 
@@ -10450,6 +10602,13 @@
   <p:clrMapOvr>
     <a:masterClrMapping/>
   </p:clrMapOvr>
+  <p:timing>
+    <p:tnLst>
+      <p:par>
+        <p:cTn id="1" dur="indefinite" restart="never" nodeType="tmRoot"/>
+      </p:par>
+    </p:tnLst>
+  </p:timing>
 </p:sld>
 </file>
 
@@ -10741,6 +10900,13 @@
   <p:clrMapOvr>
     <a:masterClrMapping/>
   </p:clrMapOvr>
+  <p:timing>
+    <p:tnLst>
+      <p:par>
+        <p:cTn id="1" dur="indefinite" restart="never" nodeType="tmRoot"/>
+      </p:par>
+    </p:tnLst>
+  </p:timing>
 </p:sld>
 </file>
 
@@ -11302,6 +11468,13 @@
   <p:clrMapOvr>
     <a:masterClrMapping/>
   </p:clrMapOvr>
+  <p:timing>
+    <p:tnLst>
+      <p:par>
+        <p:cTn id="1" dur="indefinite" restart="never" nodeType="tmRoot"/>
+      </p:par>
+    </p:tnLst>
+  </p:timing>
 </p:sld>
 </file>
 
@@ -11943,6 +12116,13 @@
   <p:clrMapOvr>
     <a:masterClrMapping/>
   </p:clrMapOvr>
+  <p:timing>
+    <p:tnLst>
+      <p:par>
+        <p:cTn id="1" dur="indefinite" restart="never" nodeType="tmRoot"/>
+      </p:par>
+    </p:tnLst>
+  </p:timing>
 </p:sld>
 </file>
 
